--- a/assets/pptx/catalog-36.pptx
+++ b/assets/pptx/catalog-36.pptx
@@ -3251,7 +3251,7 @@
                 <a:ea typeface="Ebrima"/>
                 <a:cs typeface="Ebrima"/>
               </a:rPr>
-              <a:t>ባለውለታዬ ነው ጌታዬ (4x)</a:t>
+              <a:t>ባለውለታዬ ነው ጌታዬ 4x</a:t>
             </a:r>
           </a:p>
         </p:txBody>
@@ -3511,7 +3511,7 @@
                 <a:ea typeface="Ebrima"/>
                 <a:cs typeface="Ebrima"/>
               </a:rPr>
-              <a:t>የምገልጸው የሱን በጐነት (2x)</a:t>
+              <a:t>የምገልጸው የሱን በጐነት 2x</a:t>
             </a:r>
           </a:p>
         </p:txBody>
@@ -3699,7 +3699,7 @@
                 <a:ea typeface="Ebrima"/>
                 <a:cs typeface="Ebrima"/>
               </a:rPr>
-              <a:t>ባለውለታዬ ነው ጌታዬ (4x)</a:t>
+              <a:t>ባለውለታዬ ነው ጌታዬ 4x</a:t>
             </a:r>
           </a:p>
         </p:txBody>
@@ -4008,7 +4008,7 @@
                 <a:ea typeface="Ebrima"/>
                 <a:cs typeface="Ebrima"/>
               </a:rPr>
-              <a:t>ዘምር አልከኝ (4x)</a:t>
+              <a:t>ዘምር አልከኝ 4x</a:t>
             </a:r>
           </a:p>
         </p:txBody>
